--- a/roadmap_parallel.pptx
+++ b/roadmap_parallel.pptx
@@ -6987,6 +6987,654 @@
         </p:nvCxnSpPr>
         <p:spPr>
           <a:xfrm>
+            <a:off x="3886200" y="1161288"/>
+            <a:ext cx="0" cy="932688"/>
+          </a:xfrm>
+          <a:prstGeom prst="line">
+            <a:avLst/>
+          </a:prstGeom>
+          <a:ln w="19050">
+            <a:solidFill>
+              <a:srgbClr val="2F5597"/>
+            </a:solidFill>
+          </a:ln>
+        </p:spPr>
+        <p:style>
+          <a:lnRef idx="2">
+            <a:schemeClr val="accent1"/>
+          </a:lnRef>
+          <a:fillRef idx="0">
+            <a:schemeClr val="accent1"/>
+          </a:fillRef>
+          <a:effectRef idx="1">
+            <a:schemeClr val="accent1"/>
+          </a:effectRef>
+          <a:fontRef idx="minor">
+            <a:schemeClr val="tx1"/>
+          </a:fontRef>
+        </p:style>
+      </p:cxnSp>
+      <p:sp>
+        <p:nvSpPr>
+          <p:cNvPr id="87" name="Pentagon 86"/>
+          <p:cNvSpPr/>
+          <p:nvPr/>
+        </p:nvSpPr>
+        <p:spPr>
+          <a:xfrm>
+            <a:off x="3886200" y="1161288"/>
+            <a:ext cx="146304" cy="137160"/>
+          </a:xfrm>
+          <a:prstGeom prst="homePlate">
+            <a:avLst/>
+          </a:prstGeom>
+          <a:solidFill>
+            <a:srgbClr val="4472C4"/>
+          </a:solidFill>
+          <a:ln w="12700">
+            <a:solidFill>
+              <a:srgbClr val="2F5597"/>
+            </a:solidFill>
+          </a:ln>
+          <a:effectLst/>
+        </p:spPr>
+        <p:style>
+          <a:lnRef idx="1">
+            <a:schemeClr val="accent1"/>
+          </a:lnRef>
+          <a:fillRef idx="3">
+            <a:schemeClr val="accent1"/>
+          </a:fillRef>
+          <a:effectRef idx="2">
+            <a:schemeClr val="accent1"/>
+          </a:effectRef>
+          <a:fontRef idx="minor">
+            <a:schemeClr val="lt1"/>
+          </a:fontRef>
+        </p:style>
+        <p:txBody>
+          <a:bodyPr rtlCol="0" anchor="ctr" wrap="square" lIns="18000" rIns="18000" tIns="9000" bIns="9000"/>
+          <a:lstStyle/>
+          <a:p>
+            <a:pPr algn="ctr"/>
+          </a:p>
+        </p:txBody>
+      </p:sp>
+      <p:cxnSp>
+        <p:nvCxnSpPr>
+          <p:cNvPr id="88" name="Connector 87"/>
+          <p:cNvCxnSpPr/>
+          <p:nvPr/>
+        </p:nvCxnSpPr>
+        <p:spPr>
+          <a:xfrm>
+            <a:off x="11963088" y="1161288"/>
+            <a:ext cx="0" cy="932688"/>
+          </a:xfrm>
+          <a:prstGeom prst="line">
+            <a:avLst/>
+          </a:prstGeom>
+          <a:ln w="19050">
+            <a:solidFill>
+              <a:srgbClr val="7F0000"/>
+            </a:solidFill>
+          </a:ln>
+        </p:spPr>
+        <p:style>
+          <a:lnRef idx="2">
+            <a:schemeClr val="accent1"/>
+          </a:lnRef>
+          <a:fillRef idx="0">
+            <a:schemeClr val="accent1"/>
+          </a:fillRef>
+          <a:effectRef idx="1">
+            <a:schemeClr val="accent1"/>
+          </a:effectRef>
+          <a:fontRef idx="minor">
+            <a:schemeClr val="tx1"/>
+          </a:fontRef>
+        </p:style>
+      </p:cxnSp>
+      <p:sp>
+        <p:nvSpPr>
+          <p:cNvPr id="89" name="Pentagon 88"/>
+          <p:cNvSpPr/>
+          <p:nvPr/>
+        </p:nvSpPr>
+        <p:spPr>
+          <a:xfrm rot="10800000">
+            <a:off x="11816784" y="1161288"/>
+            <a:ext cx="146304" cy="137160"/>
+          </a:xfrm>
+          <a:prstGeom prst="homePlate">
+            <a:avLst/>
+          </a:prstGeom>
+          <a:solidFill>
+            <a:srgbClr val="C00000"/>
+          </a:solidFill>
+          <a:ln w="12700">
+            <a:solidFill>
+              <a:srgbClr val="7F0000"/>
+            </a:solidFill>
+          </a:ln>
+          <a:effectLst/>
+        </p:spPr>
+        <p:style>
+          <a:lnRef idx="1">
+            <a:schemeClr val="accent1"/>
+          </a:lnRef>
+          <a:fillRef idx="3">
+            <a:schemeClr val="accent1"/>
+          </a:fillRef>
+          <a:effectRef idx="2">
+            <a:schemeClr val="accent1"/>
+          </a:effectRef>
+          <a:fontRef idx="minor">
+            <a:schemeClr val="lt1"/>
+          </a:fontRef>
+        </p:style>
+        <p:txBody>
+          <a:bodyPr rtlCol="0" anchor="ctr" wrap="square" lIns="18000" rIns="18000" tIns="9000" bIns="9000"/>
+          <a:lstStyle/>
+          <a:p>
+            <a:pPr algn="ctr"/>
+          </a:p>
+        </p:txBody>
+      </p:sp>
+      <p:cxnSp>
+        <p:nvCxnSpPr>
+          <p:cNvPr id="90" name="Connector 89"/>
+          <p:cNvCxnSpPr/>
+          <p:nvPr/>
+        </p:nvCxnSpPr>
+        <p:spPr>
+          <a:xfrm>
+            <a:off x="3886200" y="2093976"/>
+            <a:ext cx="0" cy="932688"/>
+          </a:xfrm>
+          <a:prstGeom prst="line">
+            <a:avLst/>
+          </a:prstGeom>
+          <a:ln w="19050">
+            <a:solidFill>
+              <a:srgbClr val="2F5597"/>
+            </a:solidFill>
+          </a:ln>
+        </p:spPr>
+        <p:style>
+          <a:lnRef idx="2">
+            <a:schemeClr val="accent1"/>
+          </a:lnRef>
+          <a:fillRef idx="0">
+            <a:schemeClr val="accent1"/>
+          </a:fillRef>
+          <a:effectRef idx="1">
+            <a:schemeClr val="accent1"/>
+          </a:effectRef>
+          <a:fontRef idx="minor">
+            <a:schemeClr val="tx1"/>
+          </a:fontRef>
+        </p:style>
+      </p:cxnSp>
+      <p:sp>
+        <p:nvSpPr>
+          <p:cNvPr id="91" name="Pentagon 90"/>
+          <p:cNvSpPr/>
+          <p:nvPr/>
+        </p:nvSpPr>
+        <p:spPr>
+          <a:xfrm>
+            <a:off x="3886200" y="2093976"/>
+            <a:ext cx="146304" cy="137160"/>
+          </a:xfrm>
+          <a:prstGeom prst="homePlate">
+            <a:avLst/>
+          </a:prstGeom>
+          <a:solidFill>
+            <a:srgbClr val="4472C4"/>
+          </a:solidFill>
+          <a:ln w="12700">
+            <a:solidFill>
+              <a:srgbClr val="2F5597"/>
+            </a:solidFill>
+          </a:ln>
+          <a:effectLst/>
+        </p:spPr>
+        <p:style>
+          <a:lnRef idx="1">
+            <a:schemeClr val="accent1"/>
+          </a:lnRef>
+          <a:fillRef idx="3">
+            <a:schemeClr val="accent1"/>
+          </a:fillRef>
+          <a:effectRef idx="2">
+            <a:schemeClr val="accent1"/>
+          </a:effectRef>
+          <a:fontRef idx="minor">
+            <a:schemeClr val="lt1"/>
+          </a:fontRef>
+        </p:style>
+        <p:txBody>
+          <a:bodyPr rtlCol="0" anchor="ctr" wrap="square" lIns="18000" rIns="18000" tIns="9000" bIns="9000"/>
+          <a:lstStyle/>
+          <a:p>
+            <a:pPr algn="ctr"/>
+          </a:p>
+        </p:txBody>
+      </p:sp>
+      <p:cxnSp>
+        <p:nvCxnSpPr>
+          <p:cNvPr id="92" name="Connector 91"/>
+          <p:cNvCxnSpPr/>
+          <p:nvPr/>
+        </p:nvCxnSpPr>
+        <p:spPr>
+          <a:xfrm>
+            <a:off x="8373360" y="2093976"/>
+            <a:ext cx="0" cy="932688"/>
+          </a:xfrm>
+          <a:prstGeom prst="line">
+            <a:avLst/>
+          </a:prstGeom>
+          <a:ln w="19050">
+            <a:solidFill>
+              <a:srgbClr val="7F0000"/>
+            </a:solidFill>
+          </a:ln>
+        </p:spPr>
+        <p:style>
+          <a:lnRef idx="2">
+            <a:schemeClr val="accent1"/>
+          </a:lnRef>
+          <a:fillRef idx="0">
+            <a:schemeClr val="accent1"/>
+          </a:fillRef>
+          <a:effectRef idx="1">
+            <a:schemeClr val="accent1"/>
+          </a:effectRef>
+          <a:fontRef idx="minor">
+            <a:schemeClr val="tx1"/>
+          </a:fontRef>
+        </p:style>
+      </p:cxnSp>
+      <p:sp>
+        <p:nvSpPr>
+          <p:cNvPr id="93" name="Pentagon 92"/>
+          <p:cNvSpPr/>
+          <p:nvPr/>
+        </p:nvSpPr>
+        <p:spPr>
+          <a:xfrm rot="10800000">
+            <a:off x="8227056" y="2093976"/>
+            <a:ext cx="146304" cy="137160"/>
+          </a:xfrm>
+          <a:prstGeom prst="homePlate">
+            <a:avLst/>
+          </a:prstGeom>
+          <a:solidFill>
+            <a:srgbClr val="C00000"/>
+          </a:solidFill>
+          <a:ln w="12700">
+            <a:solidFill>
+              <a:srgbClr val="7F0000"/>
+            </a:solidFill>
+          </a:ln>
+          <a:effectLst/>
+        </p:spPr>
+        <p:style>
+          <a:lnRef idx="1">
+            <a:schemeClr val="accent1"/>
+          </a:lnRef>
+          <a:fillRef idx="3">
+            <a:schemeClr val="accent1"/>
+          </a:fillRef>
+          <a:effectRef idx="2">
+            <a:schemeClr val="accent1"/>
+          </a:effectRef>
+          <a:fontRef idx="minor">
+            <a:schemeClr val="lt1"/>
+          </a:fontRef>
+        </p:style>
+        <p:txBody>
+          <a:bodyPr rtlCol="0" anchor="ctr" wrap="square" lIns="18000" rIns="18000" tIns="9000" bIns="9000"/>
+          <a:lstStyle/>
+          <a:p>
+            <a:pPr algn="ctr"/>
+          </a:p>
+        </p:txBody>
+      </p:sp>
+      <p:cxnSp>
+        <p:nvCxnSpPr>
+          <p:cNvPr id="94" name="Connector 93"/>
+          <p:cNvCxnSpPr/>
+          <p:nvPr/>
+        </p:nvCxnSpPr>
+        <p:spPr>
+          <a:xfrm>
+            <a:off x="3886200" y="3026664"/>
+            <a:ext cx="0" cy="932688"/>
+          </a:xfrm>
+          <a:prstGeom prst="line">
+            <a:avLst/>
+          </a:prstGeom>
+          <a:ln w="19050">
+            <a:solidFill>
+              <a:srgbClr val="2F5597"/>
+            </a:solidFill>
+          </a:ln>
+        </p:spPr>
+        <p:style>
+          <a:lnRef idx="2">
+            <a:schemeClr val="accent1"/>
+          </a:lnRef>
+          <a:fillRef idx="0">
+            <a:schemeClr val="accent1"/>
+          </a:fillRef>
+          <a:effectRef idx="1">
+            <a:schemeClr val="accent1"/>
+          </a:effectRef>
+          <a:fontRef idx="minor">
+            <a:schemeClr val="tx1"/>
+          </a:fontRef>
+        </p:style>
+      </p:cxnSp>
+      <p:sp>
+        <p:nvSpPr>
+          <p:cNvPr id="95" name="Pentagon 94"/>
+          <p:cNvSpPr/>
+          <p:nvPr/>
+        </p:nvSpPr>
+        <p:spPr>
+          <a:xfrm>
+            <a:off x="3886200" y="3026664"/>
+            <a:ext cx="146304" cy="137160"/>
+          </a:xfrm>
+          <a:prstGeom prst="homePlate">
+            <a:avLst/>
+          </a:prstGeom>
+          <a:solidFill>
+            <a:srgbClr val="4472C4"/>
+          </a:solidFill>
+          <a:ln w="12700">
+            <a:solidFill>
+              <a:srgbClr val="2F5597"/>
+            </a:solidFill>
+          </a:ln>
+          <a:effectLst/>
+        </p:spPr>
+        <p:style>
+          <a:lnRef idx="1">
+            <a:schemeClr val="accent1"/>
+          </a:lnRef>
+          <a:fillRef idx="3">
+            <a:schemeClr val="accent1"/>
+          </a:fillRef>
+          <a:effectRef idx="2">
+            <a:schemeClr val="accent1"/>
+          </a:effectRef>
+          <a:fontRef idx="minor">
+            <a:schemeClr val="lt1"/>
+          </a:fontRef>
+        </p:style>
+        <p:txBody>
+          <a:bodyPr rtlCol="0" anchor="ctr" wrap="square" lIns="18000" rIns="18000" tIns="9000" bIns="9000"/>
+          <a:lstStyle/>
+          <a:p>
+            <a:pPr algn="ctr"/>
+          </a:p>
+        </p:txBody>
+      </p:sp>
+      <p:cxnSp>
+        <p:nvCxnSpPr>
+          <p:cNvPr id="96" name="Connector 95"/>
+          <p:cNvCxnSpPr/>
+          <p:nvPr/>
+        </p:nvCxnSpPr>
+        <p:spPr>
+          <a:xfrm>
+            <a:off x="11963088" y="3026664"/>
+            <a:ext cx="0" cy="932688"/>
+          </a:xfrm>
+          <a:prstGeom prst="line">
+            <a:avLst/>
+          </a:prstGeom>
+          <a:ln w="19050">
+            <a:solidFill>
+              <a:srgbClr val="7F0000"/>
+            </a:solidFill>
+          </a:ln>
+        </p:spPr>
+        <p:style>
+          <a:lnRef idx="2">
+            <a:schemeClr val="accent1"/>
+          </a:lnRef>
+          <a:fillRef idx="0">
+            <a:schemeClr val="accent1"/>
+          </a:fillRef>
+          <a:effectRef idx="1">
+            <a:schemeClr val="accent1"/>
+          </a:effectRef>
+          <a:fontRef idx="minor">
+            <a:schemeClr val="tx1"/>
+          </a:fontRef>
+        </p:style>
+      </p:cxnSp>
+      <p:sp>
+        <p:nvSpPr>
+          <p:cNvPr id="97" name="Pentagon 96"/>
+          <p:cNvSpPr/>
+          <p:nvPr/>
+        </p:nvSpPr>
+        <p:spPr>
+          <a:xfrm rot="10800000">
+            <a:off x="11816784" y="3026664"/>
+            <a:ext cx="146304" cy="137160"/>
+          </a:xfrm>
+          <a:prstGeom prst="homePlate">
+            <a:avLst/>
+          </a:prstGeom>
+          <a:solidFill>
+            <a:srgbClr val="C00000"/>
+          </a:solidFill>
+          <a:ln w="12700">
+            <a:solidFill>
+              <a:srgbClr val="7F0000"/>
+            </a:solidFill>
+          </a:ln>
+          <a:effectLst/>
+        </p:spPr>
+        <p:style>
+          <a:lnRef idx="1">
+            <a:schemeClr val="accent1"/>
+          </a:lnRef>
+          <a:fillRef idx="3">
+            <a:schemeClr val="accent1"/>
+          </a:fillRef>
+          <a:effectRef idx="2">
+            <a:schemeClr val="accent1"/>
+          </a:effectRef>
+          <a:fontRef idx="minor">
+            <a:schemeClr val="lt1"/>
+          </a:fontRef>
+        </p:style>
+        <p:txBody>
+          <a:bodyPr rtlCol="0" anchor="ctr" wrap="square" lIns="18000" rIns="18000" tIns="9000" bIns="9000"/>
+          <a:lstStyle/>
+          <a:p>
+            <a:pPr algn="ctr"/>
+          </a:p>
+        </p:txBody>
+      </p:sp>
+      <p:cxnSp>
+        <p:nvCxnSpPr>
+          <p:cNvPr id="98" name="Connector 97"/>
+          <p:cNvCxnSpPr/>
+          <p:nvPr/>
+        </p:nvCxnSpPr>
+        <p:spPr>
+          <a:xfrm>
+            <a:off x="3886200" y="3959352"/>
+            <a:ext cx="0" cy="932688"/>
+          </a:xfrm>
+          <a:prstGeom prst="line">
+            <a:avLst/>
+          </a:prstGeom>
+          <a:ln w="19050">
+            <a:solidFill>
+              <a:srgbClr val="2F5597"/>
+            </a:solidFill>
+          </a:ln>
+        </p:spPr>
+        <p:style>
+          <a:lnRef idx="2">
+            <a:schemeClr val="accent1"/>
+          </a:lnRef>
+          <a:fillRef idx="0">
+            <a:schemeClr val="accent1"/>
+          </a:fillRef>
+          <a:effectRef idx="1">
+            <a:schemeClr val="accent1"/>
+          </a:effectRef>
+          <a:fontRef idx="minor">
+            <a:schemeClr val="tx1"/>
+          </a:fontRef>
+        </p:style>
+      </p:cxnSp>
+      <p:sp>
+        <p:nvSpPr>
+          <p:cNvPr id="99" name="Pentagon 98"/>
+          <p:cNvSpPr/>
+          <p:nvPr/>
+        </p:nvSpPr>
+        <p:spPr>
+          <a:xfrm>
+            <a:off x="3886200" y="3959352"/>
+            <a:ext cx="146304" cy="137160"/>
+          </a:xfrm>
+          <a:prstGeom prst="homePlate">
+            <a:avLst/>
+          </a:prstGeom>
+          <a:solidFill>
+            <a:srgbClr val="4472C4"/>
+          </a:solidFill>
+          <a:ln w="12700">
+            <a:solidFill>
+              <a:srgbClr val="2F5597"/>
+            </a:solidFill>
+          </a:ln>
+          <a:effectLst/>
+        </p:spPr>
+        <p:style>
+          <a:lnRef idx="1">
+            <a:schemeClr val="accent1"/>
+          </a:lnRef>
+          <a:fillRef idx="3">
+            <a:schemeClr val="accent1"/>
+          </a:fillRef>
+          <a:effectRef idx="2">
+            <a:schemeClr val="accent1"/>
+          </a:effectRef>
+          <a:fontRef idx="minor">
+            <a:schemeClr val="lt1"/>
+          </a:fontRef>
+        </p:style>
+        <p:txBody>
+          <a:bodyPr rtlCol="0" anchor="ctr" wrap="square" lIns="18000" rIns="18000" tIns="9000" bIns="9000"/>
+          <a:lstStyle/>
+          <a:p>
+            <a:pPr algn="ctr"/>
+          </a:p>
+        </p:txBody>
+      </p:sp>
+      <p:cxnSp>
+        <p:nvCxnSpPr>
+          <p:cNvPr id="100" name="Connector 99"/>
+          <p:cNvCxnSpPr/>
+          <p:nvPr/>
+        </p:nvCxnSpPr>
+        <p:spPr>
+          <a:xfrm>
+            <a:off x="8373360" y="3959352"/>
+            <a:ext cx="0" cy="932688"/>
+          </a:xfrm>
+          <a:prstGeom prst="line">
+            <a:avLst/>
+          </a:prstGeom>
+          <a:ln w="19050">
+            <a:solidFill>
+              <a:srgbClr val="7F0000"/>
+            </a:solidFill>
+          </a:ln>
+        </p:spPr>
+        <p:style>
+          <a:lnRef idx="2">
+            <a:schemeClr val="accent1"/>
+          </a:lnRef>
+          <a:fillRef idx="0">
+            <a:schemeClr val="accent1"/>
+          </a:fillRef>
+          <a:effectRef idx="1">
+            <a:schemeClr val="accent1"/>
+          </a:effectRef>
+          <a:fontRef idx="minor">
+            <a:schemeClr val="tx1"/>
+          </a:fontRef>
+        </p:style>
+      </p:cxnSp>
+      <p:sp>
+        <p:nvSpPr>
+          <p:cNvPr id="101" name="Pentagon 100"/>
+          <p:cNvSpPr/>
+          <p:nvPr/>
+        </p:nvSpPr>
+        <p:spPr>
+          <a:xfrm rot="10800000">
+            <a:off x="8227056" y="3959352"/>
+            <a:ext cx="146304" cy="137160"/>
+          </a:xfrm>
+          <a:prstGeom prst="homePlate">
+            <a:avLst/>
+          </a:prstGeom>
+          <a:solidFill>
+            <a:srgbClr val="C00000"/>
+          </a:solidFill>
+          <a:ln w="12700">
+            <a:solidFill>
+              <a:srgbClr val="7F0000"/>
+            </a:solidFill>
+          </a:ln>
+          <a:effectLst/>
+        </p:spPr>
+        <p:style>
+          <a:lnRef idx="1">
+            <a:schemeClr val="accent1"/>
+          </a:lnRef>
+          <a:fillRef idx="3">
+            <a:schemeClr val="accent1"/>
+          </a:fillRef>
+          <a:effectRef idx="2">
+            <a:schemeClr val="accent1"/>
+          </a:effectRef>
+          <a:fontRef idx="minor">
+            <a:schemeClr val="lt1"/>
+          </a:fontRef>
+        </p:style>
+        <p:txBody>
+          <a:bodyPr rtlCol="0" anchor="ctr" wrap="square" lIns="18000" rIns="18000" tIns="9000" bIns="9000"/>
+          <a:lstStyle/>
+          <a:p>
+            <a:pPr algn="ctr"/>
+          </a:p>
+        </p:txBody>
+      </p:sp>
+      <p:cxnSp>
+        <p:nvCxnSpPr>
+          <p:cNvPr id="102" name="Connector 101"/>
+          <p:cNvCxnSpPr/>
+          <p:nvPr/>
+        </p:nvCxnSpPr>
+        <p:spPr>
+          <a:xfrm>
             <a:off x="4110558" y="1161288"/>
             <a:ext cx="0" cy="3730752"/>
           </a:xfrm>
@@ -7016,7 +7664,7 @@
       </p:cxnSp>
       <p:cxnSp>
         <p:nvCxnSpPr>
-          <p:cNvPr id="87" name="Connector 86"/>
+          <p:cNvPr id="103" name="Connector 102"/>
           <p:cNvCxnSpPr/>
           <p:nvPr/>
         </p:nvCxnSpPr>
@@ -7051,7 +7699,7 @@
       </p:cxnSp>
       <p:sp>
         <p:nvSpPr>
-          <p:cNvPr id="88" name="Rectangle 87"/>
+          <p:cNvPr id="104" name="Rectangle 103"/>
           <p:cNvSpPr/>
           <p:nvPr/>
         </p:nvSpPr>
@@ -7105,7 +7753,7 @@
       </p:sp>
       <p:cxnSp>
         <p:nvCxnSpPr>
-          <p:cNvPr id="89" name="Connector 88"/>
+          <p:cNvPr id="105" name="Connector 104"/>
           <p:cNvCxnSpPr/>
           <p:nvPr/>
         </p:nvCxnSpPr>
@@ -7140,7 +7788,7 @@
       </p:cxnSp>
       <p:sp>
         <p:nvSpPr>
-          <p:cNvPr id="90" name="Rectangle 89"/>
+          <p:cNvPr id="106" name="Rectangle 105"/>
           <p:cNvSpPr/>
           <p:nvPr/>
         </p:nvSpPr>
@@ -7194,7 +7842,7 @@
       </p:sp>
       <p:sp>
         <p:nvSpPr>
-          <p:cNvPr id="91" name="Diamond 90"/>
+          <p:cNvPr id="107" name="Diamond 106"/>
           <p:cNvSpPr/>
           <p:nvPr/>
         </p:nvSpPr>
@@ -7240,7 +7888,7 @@
       </p:sp>
       <p:sp>
         <p:nvSpPr>
-          <p:cNvPr id="92" name="Rectangle 91"/>
+          <p:cNvPr id="108" name="Rectangle 107"/>
           <p:cNvSpPr/>
           <p:nvPr/>
         </p:nvSpPr>
@@ -7290,7 +7938,7 @@
       </p:sp>
       <p:sp>
         <p:nvSpPr>
-          <p:cNvPr id="93" name="Diamond 92"/>
+          <p:cNvPr id="109" name="Diamond 108"/>
           <p:cNvSpPr/>
           <p:nvPr/>
         </p:nvSpPr>
@@ -7336,7 +7984,7 @@
       </p:sp>
       <p:sp>
         <p:nvSpPr>
-          <p:cNvPr id="94" name="Rectangle 93"/>
+          <p:cNvPr id="110" name="Rectangle 109"/>
           <p:cNvSpPr/>
           <p:nvPr/>
         </p:nvSpPr>
@@ -7386,7 +8034,7 @@
       </p:sp>
       <p:sp>
         <p:nvSpPr>
-          <p:cNvPr id="95" name="Rounded Rectangle 94"/>
+          <p:cNvPr id="111" name="Rounded Rectangle 110"/>
           <p:cNvSpPr/>
           <p:nvPr/>
         </p:nvSpPr>
@@ -7432,7 +8080,7 @@
       </p:sp>
       <p:sp>
         <p:nvSpPr>
-          <p:cNvPr id="96" name="Rectangle 95"/>
+          <p:cNvPr id="112" name="Rectangle 111"/>
           <p:cNvSpPr/>
           <p:nvPr/>
         </p:nvSpPr>
@@ -7482,7 +8130,7 @@
       </p:sp>
       <p:sp>
         <p:nvSpPr>
-          <p:cNvPr id="97" name="Rounded Rectangle 96"/>
+          <p:cNvPr id="113" name="Rounded Rectangle 112"/>
           <p:cNvSpPr/>
           <p:nvPr/>
         </p:nvSpPr>
@@ -7528,7 +8176,7 @@
       </p:sp>
       <p:sp>
         <p:nvSpPr>
-          <p:cNvPr id="98" name="Rectangle 97"/>
+          <p:cNvPr id="114" name="Rectangle 113"/>
           <p:cNvSpPr/>
           <p:nvPr/>
         </p:nvSpPr>
@@ -7578,7 +8226,7 @@
       </p:sp>
       <p:sp>
         <p:nvSpPr>
-          <p:cNvPr id="99" name="Rounded Rectangle 98"/>
+          <p:cNvPr id="115" name="Rounded Rectangle 114"/>
           <p:cNvSpPr/>
           <p:nvPr/>
         </p:nvSpPr>
@@ -7624,7 +8272,7 @@
       </p:sp>
       <p:sp>
         <p:nvSpPr>
-          <p:cNvPr id="100" name="Rectangle 99"/>
+          <p:cNvPr id="116" name="Rectangle 115"/>
           <p:cNvSpPr/>
           <p:nvPr/>
         </p:nvSpPr>
@@ -7674,7 +8322,7 @@
       </p:sp>
       <p:sp>
         <p:nvSpPr>
-          <p:cNvPr id="101" name="Rounded Rectangle 100"/>
+          <p:cNvPr id="117" name="Rounded Rectangle 116"/>
           <p:cNvSpPr/>
           <p:nvPr/>
         </p:nvSpPr>
@@ -7720,7 +8368,7 @@
       </p:sp>
       <p:sp>
         <p:nvSpPr>
-          <p:cNvPr id="102" name="Rectangle 101"/>
+          <p:cNvPr id="118" name="Rectangle 117"/>
           <p:cNvSpPr/>
           <p:nvPr/>
         </p:nvSpPr>
@@ -7770,7 +8418,7 @@
       </p:sp>
       <p:sp>
         <p:nvSpPr>
-          <p:cNvPr id="103" name="Rounded Rectangle 102"/>
+          <p:cNvPr id="119" name="Rounded Rectangle 118"/>
           <p:cNvSpPr/>
           <p:nvPr/>
         </p:nvSpPr>
@@ -7816,7 +8464,7 @@
       </p:sp>
       <p:sp>
         <p:nvSpPr>
-          <p:cNvPr id="104" name="Rectangle 103"/>
+          <p:cNvPr id="120" name="Rectangle 119"/>
           <p:cNvSpPr/>
           <p:nvPr/>
         </p:nvSpPr>
@@ -7866,7 +8514,7 @@
       </p:sp>
       <p:sp>
         <p:nvSpPr>
-          <p:cNvPr id="105" name="Pentagon 104"/>
+          <p:cNvPr id="121" name="Pentagon 120"/>
           <p:cNvSpPr/>
           <p:nvPr/>
         </p:nvSpPr>
@@ -7912,7 +8560,7 @@
       </p:sp>
       <p:sp>
         <p:nvSpPr>
-          <p:cNvPr id="106" name="Rectangle 105"/>
+          <p:cNvPr id="122" name="Rectangle 121"/>
           <p:cNvSpPr/>
           <p:nvPr/>
         </p:nvSpPr>
@@ -7962,7 +8610,7 @@
       </p:sp>
       <p:sp>
         <p:nvSpPr>
-          <p:cNvPr id="107" name="Pentagon 106"/>
+          <p:cNvPr id="123" name="Pentagon 122"/>
           <p:cNvSpPr/>
           <p:nvPr/>
         </p:nvSpPr>
@@ -8008,7 +8656,7 @@
       </p:sp>
       <p:sp>
         <p:nvSpPr>
-          <p:cNvPr id="108" name="Rectangle 107"/>
+          <p:cNvPr id="124" name="Rectangle 123"/>
           <p:cNvSpPr/>
           <p:nvPr/>
         </p:nvSpPr>

--- a/roadmap_parallel.pptx
+++ b/roadmap_parallel.pptx
@@ -6979,59 +6979,24 @@
           </a:p>
         </p:txBody>
       </p:sp>
-      <p:cxnSp>
-        <p:nvCxnSpPr>
-          <p:cNvPr id="86" name="Connector 85"/>
-          <p:cNvCxnSpPr/>
-          <p:nvPr/>
-        </p:nvCxnSpPr>
-        <p:spPr>
-          <a:xfrm>
-            <a:off x="3886200" y="1161288"/>
-            <a:ext cx="0" cy="932688"/>
-          </a:xfrm>
-          <a:prstGeom prst="line">
-            <a:avLst/>
-          </a:prstGeom>
-          <a:ln w="19050">
-            <a:solidFill>
-              <a:srgbClr val="2F5597"/>
-            </a:solidFill>
-          </a:ln>
-        </p:spPr>
-        <p:style>
-          <a:lnRef idx="2">
-            <a:schemeClr val="accent1"/>
-          </a:lnRef>
-          <a:fillRef idx="0">
-            <a:schemeClr val="accent1"/>
-          </a:fillRef>
-          <a:effectRef idx="1">
-            <a:schemeClr val="accent1"/>
-          </a:effectRef>
-          <a:fontRef idx="minor">
-            <a:schemeClr val="tx1"/>
-          </a:fontRef>
-        </p:style>
-      </p:cxnSp>
-      <p:sp>
-        <p:nvSpPr>
-          <p:cNvPr id="87" name="Pentagon 86"/>
+      <p:sp>
+        <p:nvSpPr>
+          <p:cNvPr id="86" name="Diamond 85"/>
           <p:cNvSpPr/>
           <p:nvPr/>
         </p:nvSpPr>
         <p:spPr>
           <a:xfrm>
-            <a:off x="3886200" y="1161288"/>
-            <a:ext cx="146304" cy="137160"/>
-          </a:xfrm>
-          <a:prstGeom prst="homePlate">
+            <a:off x="3813048" y="1243584"/>
+            <a:ext cx="146304" cy="146304"/>
+          </a:xfrm>
+          <a:prstGeom prst="diamond">
             <a:avLst/>
           </a:prstGeom>
           <a:solidFill>
             <a:srgbClr val="4472C4"/>
           </a:solidFill>
-          <a:ln w="12700">
+          <a:ln w="15875">
             <a:solidFill>
               <a:srgbClr val="2F5597"/>
             </a:solidFill>
@@ -7060,59 +7025,24 @@
           </a:p>
         </p:txBody>
       </p:sp>
-      <p:cxnSp>
-        <p:nvCxnSpPr>
-          <p:cNvPr id="88" name="Connector 87"/>
-          <p:cNvCxnSpPr/>
-          <p:nvPr/>
-        </p:nvCxnSpPr>
-        <p:spPr>
-          <a:xfrm>
-            <a:off x="11963088" y="1161288"/>
-            <a:ext cx="0" cy="932688"/>
-          </a:xfrm>
-          <a:prstGeom prst="line">
-            <a:avLst/>
-          </a:prstGeom>
-          <a:ln w="19050">
-            <a:solidFill>
-              <a:srgbClr val="7F0000"/>
-            </a:solidFill>
-          </a:ln>
-        </p:spPr>
-        <p:style>
-          <a:lnRef idx="2">
-            <a:schemeClr val="accent1"/>
-          </a:lnRef>
-          <a:fillRef idx="0">
-            <a:schemeClr val="accent1"/>
-          </a:fillRef>
-          <a:effectRef idx="1">
-            <a:schemeClr val="accent1"/>
-          </a:effectRef>
-          <a:fontRef idx="minor">
-            <a:schemeClr val="tx1"/>
-          </a:fontRef>
-        </p:style>
-      </p:cxnSp>
-      <p:sp>
-        <p:nvSpPr>
-          <p:cNvPr id="89" name="Pentagon 88"/>
+      <p:sp>
+        <p:nvSpPr>
+          <p:cNvPr id="87" name="Diamond 86"/>
           <p:cNvSpPr/>
           <p:nvPr/>
         </p:nvSpPr>
         <p:spPr>
-          <a:xfrm rot="10800000">
-            <a:off x="11816784" y="1161288"/>
-            <a:ext cx="146304" cy="137160"/>
-          </a:xfrm>
-          <a:prstGeom prst="homePlate">
+          <a:xfrm>
+            <a:off x="11889936" y="1243584"/>
+            <a:ext cx="146304" cy="146304"/>
+          </a:xfrm>
+          <a:prstGeom prst="diamond">
             <a:avLst/>
           </a:prstGeom>
           <a:solidFill>
             <a:srgbClr val="C00000"/>
           </a:solidFill>
-          <a:ln w="12700">
+          <a:ln w="15875">
             <a:solidFill>
               <a:srgbClr val="7F0000"/>
             </a:solidFill>
@@ -7141,59 +7071,24 @@
           </a:p>
         </p:txBody>
       </p:sp>
-      <p:cxnSp>
-        <p:nvCxnSpPr>
-          <p:cNvPr id="90" name="Connector 89"/>
-          <p:cNvCxnSpPr/>
-          <p:nvPr/>
-        </p:nvCxnSpPr>
-        <p:spPr>
-          <a:xfrm>
-            <a:off x="3886200" y="2093976"/>
-            <a:ext cx="0" cy="932688"/>
-          </a:xfrm>
-          <a:prstGeom prst="line">
-            <a:avLst/>
-          </a:prstGeom>
-          <a:ln w="19050">
-            <a:solidFill>
-              <a:srgbClr val="2F5597"/>
-            </a:solidFill>
-          </a:ln>
-        </p:spPr>
-        <p:style>
-          <a:lnRef idx="2">
-            <a:schemeClr val="accent1"/>
-          </a:lnRef>
-          <a:fillRef idx="0">
-            <a:schemeClr val="accent1"/>
-          </a:fillRef>
-          <a:effectRef idx="1">
-            <a:schemeClr val="accent1"/>
-          </a:effectRef>
-          <a:fontRef idx="minor">
-            <a:schemeClr val="tx1"/>
-          </a:fontRef>
-        </p:style>
-      </p:cxnSp>
-      <p:sp>
-        <p:nvSpPr>
-          <p:cNvPr id="91" name="Pentagon 90"/>
+      <p:sp>
+        <p:nvSpPr>
+          <p:cNvPr id="88" name="Diamond 87"/>
           <p:cNvSpPr/>
           <p:nvPr/>
         </p:nvSpPr>
         <p:spPr>
           <a:xfrm>
-            <a:off x="3886200" y="2093976"/>
-            <a:ext cx="146304" cy="137160"/>
-          </a:xfrm>
-          <a:prstGeom prst="homePlate">
+            <a:off x="3813048" y="2176272"/>
+            <a:ext cx="146304" cy="146304"/>
+          </a:xfrm>
+          <a:prstGeom prst="diamond">
             <a:avLst/>
           </a:prstGeom>
           <a:solidFill>
             <a:srgbClr val="4472C4"/>
           </a:solidFill>
-          <a:ln w="12700">
+          <a:ln w="15875">
             <a:solidFill>
               <a:srgbClr val="2F5597"/>
             </a:solidFill>
@@ -7222,59 +7117,208 @@
           </a:p>
         </p:txBody>
       </p:sp>
-      <p:cxnSp>
-        <p:nvCxnSpPr>
-          <p:cNvPr id="92" name="Connector 91"/>
-          <p:cNvCxnSpPr/>
-          <p:nvPr/>
-        </p:nvCxnSpPr>
-        <p:spPr>
-          <a:xfrm>
-            <a:off x="8373360" y="2093976"/>
-            <a:ext cx="0" cy="932688"/>
-          </a:xfrm>
-          <a:prstGeom prst="line">
-            <a:avLst/>
-          </a:prstGeom>
-          <a:ln w="19050">
-            <a:solidFill>
-              <a:srgbClr val="7F0000"/>
-            </a:solidFill>
-          </a:ln>
-        </p:spPr>
-        <p:style>
-          <a:lnRef idx="2">
-            <a:schemeClr val="accent1"/>
-          </a:lnRef>
-          <a:fillRef idx="0">
-            <a:schemeClr val="accent1"/>
-          </a:fillRef>
-          <a:effectRef idx="1">
-            <a:schemeClr val="accent1"/>
-          </a:effectRef>
-          <a:fontRef idx="minor">
-            <a:schemeClr val="tx1"/>
-          </a:fontRef>
-        </p:style>
-      </p:cxnSp>
-      <p:sp>
-        <p:nvSpPr>
-          <p:cNvPr id="93" name="Pentagon 92"/>
+      <p:sp>
+        <p:nvSpPr>
+          <p:cNvPr id="89" name="Diamond 88"/>
           <p:cNvSpPr/>
           <p:nvPr/>
         </p:nvSpPr>
         <p:spPr>
-          <a:xfrm rot="10800000">
-            <a:off x="8227056" y="2093976"/>
-            <a:ext cx="146304" cy="137160"/>
-          </a:xfrm>
-          <a:prstGeom prst="homePlate">
+          <a:xfrm>
+            <a:off x="8300208" y="2176272"/>
+            <a:ext cx="146304" cy="146304"/>
+          </a:xfrm>
+          <a:prstGeom prst="diamond">
             <a:avLst/>
           </a:prstGeom>
           <a:solidFill>
             <a:srgbClr val="C00000"/>
           </a:solidFill>
-          <a:ln w="12700">
+          <a:ln w="15875">
+            <a:solidFill>
+              <a:srgbClr val="7F0000"/>
+            </a:solidFill>
+          </a:ln>
+          <a:effectLst/>
+        </p:spPr>
+        <p:style>
+          <a:lnRef idx="1">
+            <a:schemeClr val="accent1"/>
+          </a:lnRef>
+          <a:fillRef idx="3">
+            <a:schemeClr val="accent1"/>
+          </a:fillRef>
+          <a:effectRef idx="2">
+            <a:schemeClr val="accent1"/>
+          </a:effectRef>
+          <a:fontRef idx="minor">
+            <a:schemeClr val="lt1"/>
+          </a:fontRef>
+        </p:style>
+        <p:txBody>
+          <a:bodyPr rtlCol="0" anchor="ctr" wrap="square" lIns="18000" rIns="18000" tIns="9000" bIns="9000"/>
+          <a:lstStyle/>
+          <a:p>
+            <a:pPr algn="ctr"/>
+          </a:p>
+        </p:txBody>
+      </p:sp>
+      <p:sp>
+        <p:nvSpPr>
+          <p:cNvPr id="90" name="Diamond 89"/>
+          <p:cNvSpPr/>
+          <p:nvPr/>
+        </p:nvSpPr>
+        <p:spPr>
+          <a:xfrm>
+            <a:off x="3813048" y="3108960"/>
+            <a:ext cx="146304" cy="146304"/>
+          </a:xfrm>
+          <a:prstGeom prst="diamond">
+            <a:avLst/>
+          </a:prstGeom>
+          <a:solidFill>
+            <a:srgbClr val="4472C4"/>
+          </a:solidFill>
+          <a:ln w="15875">
+            <a:solidFill>
+              <a:srgbClr val="2F5597"/>
+            </a:solidFill>
+          </a:ln>
+          <a:effectLst/>
+        </p:spPr>
+        <p:style>
+          <a:lnRef idx="1">
+            <a:schemeClr val="accent1"/>
+          </a:lnRef>
+          <a:fillRef idx="3">
+            <a:schemeClr val="accent1"/>
+          </a:fillRef>
+          <a:effectRef idx="2">
+            <a:schemeClr val="accent1"/>
+          </a:effectRef>
+          <a:fontRef idx="minor">
+            <a:schemeClr val="lt1"/>
+          </a:fontRef>
+        </p:style>
+        <p:txBody>
+          <a:bodyPr rtlCol="0" anchor="ctr" wrap="square" lIns="18000" rIns="18000" tIns="9000" bIns="9000"/>
+          <a:lstStyle/>
+          <a:p>
+            <a:pPr algn="ctr"/>
+          </a:p>
+        </p:txBody>
+      </p:sp>
+      <p:sp>
+        <p:nvSpPr>
+          <p:cNvPr id="91" name="Diamond 90"/>
+          <p:cNvSpPr/>
+          <p:nvPr/>
+        </p:nvSpPr>
+        <p:spPr>
+          <a:xfrm>
+            <a:off x="11889936" y="3108960"/>
+            <a:ext cx="146304" cy="146304"/>
+          </a:xfrm>
+          <a:prstGeom prst="diamond">
+            <a:avLst/>
+          </a:prstGeom>
+          <a:solidFill>
+            <a:srgbClr val="C00000"/>
+          </a:solidFill>
+          <a:ln w="15875">
+            <a:solidFill>
+              <a:srgbClr val="7F0000"/>
+            </a:solidFill>
+          </a:ln>
+          <a:effectLst/>
+        </p:spPr>
+        <p:style>
+          <a:lnRef idx="1">
+            <a:schemeClr val="accent1"/>
+          </a:lnRef>
+          <a:fillRef idx="3">
+            <a:schemeClr val="accent1"/>
+          </a:fillRef>
+          <a:effectRef idx="2">
+            <a:schemeClr val="accent1"/>
+          </a:effectRef>
+          <a:fontRef idx="minor">
+            <a:schemeClr val="lt1"/>
+          </a:fontRef>
+        </p:style>
+        <p:txBody>
+          <a:bodyPr rtlCol="0" anchor="ctr" wrap="square" lIns="18000" rIns="18000" tIns="9000" bIns="9000"/>
+          <a:lstStyle/>
+          <a:p>
+            <a:pPr algn="ctr"/>
+          </a:p>
+        </p:txBody>
+      </p:sp>
+      <p:sp>
+        <p:nvSpPr>
+          <p:cNvPr id="92" name="Diamond 91"/>
+          <p:cNvSpPr/>
+          <p:nvPr/>
+        </p:nvSpPr>
+        <p:spPr>
+          <a:xfrm>
+            <a:off x="3813048" y="4041648"/>
+            <a:ext cx="146304" cy="146304"/>
+          </a:xfrm>
+          <a:prstGeom prst="diamond">
+            <a:avLst/>
+          </a:prstGeom>
+          <a:solidFill>
+            <a:srgbClr val="4472C4"/>
+          </a:solidFill>
+          <a:ln w="15875">
+            <a:solidFill>
+              <a:srgbClr val="2F5597"/>
+            </a:solidFill>
+          </a:ln>
+          <a:effectLst/>
+        </p:spPr>
+        <p:style>
+          <a:lnRef idx="1">
+            <a:schemeClr val="accent1"/>
+          </a:lnRef>
+          <a:fillRef idx="3">
+            <a:schemeClr val="accent1"/>
+          </a:fillRef>
+          <a:effectRef idx="2">
+            <a:schemeClr val="accent1"/>
+          </a:effectRef>
+          <a:fontRef idx="minor">
+            <a:schemeClr val="lt1"/>
+          </a:fontRef>
+        </p:style>
+        <p:txBody>
+          <a:bodyPr rtlCol="0" anchor="ctr" wrap="square" lIns="18000" rIns="18000" tIns="9000" bIns="9000"/>
+          <a:lstStyle/>
+          <a:p>
+            <a:pPr algn="ctr"/>
+          </a:p>
+        </p:txBody>
+      </p:sp>
+      <p:sp>
+        <p:nvSpPr>
+          <p:cNvPr id="93" name="Diamond 92"/>
+          <p:cNvSpPr/>
+          <p:nvPr/>
+        </p:nvSpPr>
+        <p:spPr>
+          <a:xfrm>
+            <a:off x="8300208" y="4041648"/>
+            <a:ext cx="146304" cy="146304"/>
+          </a:xfrm>
+          <a:prstGeom prst="diamond">
+            <a:avLst/>
+          </a:prstGeom>
+          <a:solidFill>
+            <a:srgbClr val="C00000"/>
+          </a:solidFill>
+          <a:ln w="15875">
             <a:solidFill>
               <a:srgbClr val="7F0000"/>
             </a:solidFill>
@@ -7311,330 +7355,6 @@
         </p:nvCxnSpPr>
         <p:spPr>
           <a:xfrm>
-            <a:off x="3886200" y="3026664"/>
-            <a:ext cx="0" cy="932688"/>
-          </a:xfrm>
-          <a:prstGeom prst="line">
-            <a:avLst/>
-          </a:prstGeom>
-          <a:ln w="19050">
-            <a:solidFill>
-              <a:srgbClr val="2F5597"/>
-            </a:solidFill>
-          </a:ln>
-        </p:spPr>
-        <p:style>
-          <a:lnRef idx="2">
-            <a:schemeClr val="accent1"/>
-          </a:lnRef>
-          <a:fillRef idx="0">
-            <a:schemeClr val="accent1"/>
-          </a:fillRef>
-          <a:effectRef idx="1">
-            <a:schemeClr val="accent1"/>
-          </a:effectRef>
-          <a:fontRef idx="minor">
-            <a:schemeClr val="tx1"/>
-          </a:fontRef>
-        </p:style>
-      </p:cxnSp>
-      <p:sp>
-        <p:nvSpPr>
-          <p:cNvPr id="95" name="Pentagon 94"/>
-          <p:cNvSpPr/>
-          <p:nvPr/>
-        </p:nvSpPr>
-        <p:spPr>
-          <a:xfrm>
-            <a:off x="3886200" y="3026664"/>
-            <a:ext cx="146304" cy="137160"/>
-          </a:xfrm>
-          <a:prstGeom prst="homePlate">
-            <a:avLst/>
-          </a:prstGeom>
-          <a:solidFill>
-            <a:srgbClr val="4472C4"/>
-          </a:solidFill>
-          <a:ln w="12700">
-            <a:solidFill>
-              <a:srgbClr val="2F5597"/>
-            </a:solidFill>
-          </a:ln>
-          <a:effectLst/>
-        </p:spPr>
-        <p:style>
-          <a:lnRef idx="1">
-            <a:schemeClr val="accent1"/>
-          </a:lnRef>
-          <a:fillRef idx="3">
-            <a:schemeClr val="accent1"/>
-          </a:fillRef>
-          <a:effectRef idx="2">
-            <a:schemeClr val="accent1"/>
-          </a:effectRef>
-          <a:fontRef idx="minor">
-            <a:schemeClr val="lt1"/>
-          </a:fontRef>
-        </p:style>
-        <p:txBody>
-          <a:bodyPr rtlCol="0" anchor="ctr" wrap="square" lIns="18000" rIns="18000" tIns="9000" bIns="9000"/>
-          <a:lstStyle/>
-          <a:p>
-            <a:pPr algn="ctr"/>
-          </a:p>
-        </p:txBody>
-      </p:sp>
-      <p:cxnSp>
-        <p:nvCxnSpPr>
-          <p:cNvPr id="96" name="Connector 95"/>
-          <p:cNvCxnSpPr/>
-          <p:nvPr/>
-        </p:nvCxnSpPr>
-        <p:spPr>
-          <a:xfrm>
-            <a:off x="11963088" y="3026664"/>
-            <a:ext cx="0" cy="932688"/>
-          </a:xfrm>
-          <a:prstGeom prst="line">
-            <a:avLst/>
-          </a:prstGeom>
-          <a:ln w="19050">
-            <a:solidFill>
-              <a:srgbClr val="7F0000"/>
-            </a:solidFill>
-          </a:ln>
-        </p:spPr>
-        <p:style>
-          <a:lnRef idx="2">
-            <a:schemeClr val="accent1"/>
-          </a:lnRef>
-          <a:fillRef idx="0">
-            <a:schemeClr val="accent1"/>
-          </a:fillRef>
-          <a:effectRef idx="1">
-            <a:schemeClr val="accent1"/>
-          </a:effectRef>
-          <a:fontRef idx="minor">
-            <a:schemeClr val="tx1"/>
-          </a:fontRef>
-        </p:style>
-      </p:cxnSp>
-      <p:sp>
-        <p:nvSpPr>
-          <p:cNvPr id="97" name="Pentagon 96"/>
-          <p:cNvSpPr/>
-          <p:nvPr/>
-        </p:nvSpPr>
-        <p:spPr>
-          <a:xfrm rot="10800000">
-            <a:off x="11816784" y="3026664"/>
-            <a:ext cx="146304" cy="137160"/>
-          </a:xfrm>
-          <a:prstGeom prst="homePlate">
-            <a:avLst/>
-          </a:prstGeom>
-          <a:solidFill>
-            <a:srgbClr val="C00000"/>
-          </a:solidFill>
-          <a:ln w="12700">
-            <a:solidFill>
-              <a:srgbClr val="7F0000"/>
-            </a:solidFill>
-          </a:ln>
-          <a:effectLst/>
-        </p:spPr>
-        <p:style>
-          <a:lnRef idx="1">
-            <a:schemeClr val="accent1"/>
-          </a:lnRef>
-          <a:fillRef idx="3">
-            <a:schemeClr val="accent1"/>
-          </a:fillRef>
-          <a:effectRef idx="2">
-            <a:schemeClr val="accent1"/>
-          </a:effectRef>
-          <a:fontRef idx="minor">
-            <a:schemeClr val="lt1"/>
-          </a:fontRef>
-        </p:style>
-        <p:txBody>
-          <a:bodyPr rtlCol="0" anchor="ctr" wrap="square" lIns="18000" rIns="18000" tIns="9000" bIns="9000"/>
-          <a:lstStyle/>
-          <a:p>
-            <a:pPr algn="ctr"/>
-          </a:p>
-        </p:txBody>
-      </p:sp>
-      <p:cxnSp>
-        <p:nvCxnSpPr>
-          <p:cNvPr id="98" name="Connector 97"/>
-          <p:cNvCxnSpPr/>
-          <p:nvPr/>
-        </p:nvCxnSpPr>
-        <p:spPr>
-          <a:xfrm>
-            <a:off x="3886200" y="3959352"/>
-            <a:ext cx="0" cy="932688"/>
-          </a:xfrm>
-          <a:prstGeom prst="line">
-            <a:avLst/>
-          </a:prstGeom>
-          <a:ln w="19050">
-            <a:solidFill>
-              <a:srgbClr val="2F5597"/>
-            </a:solidFill>
-          </a:ln>
-        </p:spPr>
-        <p:style>
-          <a:lnRef idx="2">
-            <a:schemeClr val="accent1"/>
-          </a:lnRef>
-          <a:fillRef idx="0">
-            <a:schemeClr val="accent1"/>
-          </a:fillRef>
-          <a:effectRef idx="1">
-            <a:schemeClr val="accent1"/>
-          </a:effectRef>
-          <a:fontRef idx="minor">
-            <a:schemeClr val="tx1"/>
-          </a:fontRef>
-        </p:style>
-      </p:cxnSp>
-      <p:sp>
-        <p:nvSpPr>
-          <p:cNvPr id="99" name="Pentagon 98"/>
-          <p:cNvSpPr/>
-          <p:nvPr/>
-        </p:nvSpPr>
-        <p:spPr>
-          <a:xfrm>
-            <a:off x="3886200" y="3959352"/>
-            <a:ext cx="146304" cy="137160"/>
-          </a:xfrm>
-          <a:prstGeom prst="homePlate">
-            <a:avLst/>
-          </a:prstGeom>
-          <a:solidFill>
-            <a:srgbClr val="4472C4"/>
-          </a:solidFill>
-          <a:ln w="12700">
-            <a:solidFill>
-              <a:srgbClr val="2F5597"/>
-            </a:solidFill>
-          </a:ln>
-          <a:effectLst/>
-        </p:spPr>
-        <p:style>
-          <a:lnRef idx="1">
-            <a:schemeClr val="accent1"/>
-          </a:lnRef>
-          <a:fillRef idx="3">
-            <a:schemeClr val="accent1"/>
-          </a:fillRef>
-          <a:effectRef idx="2">
-            <a:schemeClr val="accent1"/>
-          </a:effectRef>
-          <a:fontRef idx="minor">
-            <a:schemeClr val="lt1"/>
-          </a:fontRef>
-        </p:style>
-        <p:txBody>
-          <a:bodyPr rtlCol="0" anchor="ctr" wrap="square" lIns="18000" rIns="18000" tIns="9000" bIns="9000"/>
-          <a:lstStyle/>
-          <a:p>
-            <a:pPr algn="ctr"/>
-          </a:p>
-        </p:txBody>
-      </p:sp>
-      <p:cxnSp>
-        <p:nvCxnSpPr>
-          <p:cNvPr id="100" name="Connector 99"/>
-          <p:cNvCxnSpPr/>
-          <p:nvPr/>
-        </p:nvCxnSpPr>
-        <p:spPr>
-          <a:xfrm>
-            <a:off x="8373360" y="3959352"/>
-            <a:ext cx="0" cy="932688"/>
-          </a:xfrm>
-          <a:prstGeom prst="line">
-            <a:avLst/>
-          </a:prstGeom>
-          <a:ln w="19050">
-            <a:solidFill>
-              <a:srgbClr val="7F0000"/>
-            </a:solidFill>
-          </a:ln>
-        </p:spPr>
-        <p:style>
-          <a:lnRef idx="2">
-            <a:schemeClr val="accent1"/>
-          </a:lnRef>
-          <a:fillRef idx="0">
-            <a:schemeClr val="accent1"/>
-          </a:fillRef>
-          <a:effectRef idx="1">
-            <a:schemeClr val="accent1"/>
-          </a:effectRef>
-          <a:fontRef idx="minor">
-            <a:schemeClr val="tx1"/>
-          </a:fontRef>
-        </p:style>
-      </p:cxnSp>
-      <p:sp>
-        <p:nvSpPr>
-          <p:cNvPr id="101" name="Pentagon 100"/>
-          <p:cNvSpPr/>
-          <p:nvPr/>
-        </p:nvSpPr>
-        <p:spPr>
-          <a:xfrm rot="10800000">
-            <a:off x="8227056" y="3959352"/>
-            <a:ext cx="146304" cy="137160"/>
-          </a:xfrm>
-          <a:prstGeom prst="homePlate">
-            <a:avLst/>
-          </a:prstGeom>
-          <a:solidFill>
-            <a:srgbClr val="C00000"/>
-          </a:solidFill>
-          <a:ln w="12700">
-            <a:solidFill>
-              <a:srgbClr val="7F0000"/>
-            </a:solidFill>
-          </a:ln>
-          <a:effectLst/>
-        </p:spPr>
-        <p:style>
-          <a:lnRef idx="1">
-            <a:schemeClr val="accent1"/>
-          </a:lnRef>
-          <a:fillRef idx="3">
-            <a:schemeClr val="accent1"/>
-          </a:fillRef>
-          <a:effectRef idx="2">
-            <a:schemeClr val="accent1"/>
-          </a:effectRef>
-          <a:fontRef idx="minor">
-            <a:schemeClr val="lt1"/>
-          </a:fontRef>
-        </p:style>
-        <p:txBody>
-          <a:bodyPr rtlCol="0" anchor="ctr" wrap="square" lIns="18000" rIns="18000" tIns="9000" bIns="9000"/>
-          <a:lstStyle/>
-          <a:p>
-            <a:pPr algn="ctr"/>
-          </a:p>
-        </p:txBody>
-      </p:sp>
-      <p:cxnSp>
-        <p:nvCxnSpPr>
-          <p:cNvPr id="102" name="Connector 101"/>
-          <p:cNvCxnSpPr/>
-          <p:nvPr/>
-        </p:nvCxnSpPr>
-        <p:spPr>
-          <a:xfrm>
             <a:off x="4110558" y="1161288"/>
             <a:ext cx="0" cy="3730752"/>
           </a:xfrm>
@@ -7664,7 +7384,7 @@
       </p:cxnSp>
       <p:cxnSp>
         <p:nvCxnSpPr>
-          <p:cNvPr id="103" name="Connector 102"/>
+          <p:cNvPr id="95" name="Connector 94"/>
           <p:cNvCxnSpPr/>
           <p:nvPr/>
         </p:nvCxnSpPr>
@@ -7699,7 +7419,7 @@
       </p:cxnSp>
       <p:sp>
         <p:nvSpPr>
-          <p:cNvPr id="104" name="Rectangle 103"/>
+          <p:cNvPr id="96" name="Rectangle 95"/>
           <p:cNvSpPr/>
           <p:nvPr/>
         </p:nvSpPr>
@@ -7753,7 +7473,7 @@
       </p:sp>
       <p:cxnSp>
         <p:nvCxnSpPr>
-          <p:cNvPr id="105" name="Connector 104"/>
+          <p:cNvPr id="97" name="Connector 96"/>
           <p:cNvCxnSpPr/>
           <p:nvPr/>
         </p:nvCxnSpPr>
@@ -7788,7 +7508,7 @@
       </p:cxnSp>
       <p:sp>
         <p:nvSpPr>
-          <p:cNvPr id="106" name="Rectangle 105"/>
+          <p:cNvPr id="98" name="Rectangle 97"/>
           <p:cNvSpPr/>
           <p:nvPr/>
         </p:nvSpPr>
@@ -7842,7 +7562,7 @@
       </p:sp>
       <p:sp>
         <p:nvSpPr>
-          <p:cNvPr id="107" name="Diamond 106"/>
+          <p:cNvPr id="99" name="Diamond 98"/>
           <p:cNvSpPr/>
           <p:nvPr/>
         </p:nvSpPr>
@@ -7888,7 +7608,7 @@
       </p:sp>
       <p:sp>
         <p:nvSpPr>
-          <p:cNvPr id="108" name="Rectangle 107"/>
+          <p:cNvPr id="100" name="Rectangle 99"/>
           <p:cNvSpPr/>
           <p:nvPr/>
         </p:nvSpPr>
@@ -7938,7 +7658,7 @@
       </p:sp>
       <p:sp>
         <p:nvSpPr>
-          <p:cNvPr id="109" name="Diamond 108"/>
+          <p:cNvPr id="101" name="Diamond 100"/>
           <p:cNvSpPr/>
           <p:nvPr/>
         </p:nvSpPr>
@@ -7984,7 +7704,7 @@
       </p:sp>
       <p:sp>
         <p:nvSpPr>
-          <p:cNvPr id="110" name="Rectangle 109"/>
+          <p:cNvPr id="102" name="Rectangle 101"/>
           <p:cNvSpPr/>
           <p:nvPr/>
         </p:nvSpPr>
@@ -8034,7 +7754,7 @@
       </p:sp>
       <p:sp>
         <p:nvSpPr>
-          <p:cNvPr id="111" name="Rounded Rectangle 110"/>
+          <p:cNvPr id="103" name="Rounded Rectangle 102"/>
           <p:cNvSpPr/>
           <p:nvPr/>
         </p:nvSpPr>
@@ -8080,7 +7800,7 @@
       </p:sp>
       <p:sp>
         <p:nvSpPr>
-          <p:cNvPr id="112" name="Rectangle 111"/>
+          <p:cNvPr id="104" name="Rectangle 103"/>
           <p:cNvSpPr/>
           <p:nvPr/>
         </p:nvSpPr>
@@ -8130,7 +7850,7 @@
       </p:sp>
       <p:sp>
         <p:nvSpPr>
-          <p:cNvPr id="113" name="Rounded Rectangle 112"/>
+          <p:cNvPr id="105" name="Rounded Rectangle 104"/>
           <p:cNvSpPr/>
           <p:nvPr/>
         </p:nvSpPr>
@@ -8176,7 +7896,7 @@
       </p:sp>
       <p:sp>
         <p:nvSpPr>
-          <p:cNvPr id="114" name="Rectangle 113"/>
+          <p:cNvPr id="106" name="Rectangle 105"/>
           <p:cNvSpPr/>
           <p:nvPr/>
         </p:nvSpPr>
@@ -8226,7 +7946,7 @@
       </p:sp>
       <p:sp>
         <p:nvSpPr>
-          <p:cNvPr id="115" name="Rounded Rectangle 114"/>
+          <p:cNvPr id="107" name="Rounded Rectangle 106"/>
           <p:cNvSpPr/>
           <p:nvPr/>
         </p:nvSpPr>
@@ -8272,7 +7992,7 @@
       </p:sp>
       <p:sp>
         <p:nvSpPr>
-          <p:cNvPr id="116" name="Rectangle 115"/>
+          <p:cNvPr id="108" name="Rectangle 107"/>
           <p:cNvSpPr/>
           <p:nvPr/>
         </p:nvSpPr>
@@ -8322,7 +8042,7 @@
       </p:sp>
       <p:sp>
         <p:nvSpPr>
-          <p:cNvPr id="117" name="Rounded Rectangle 116"/>
+          <p:cNvPr id="109" name="Rounded Rectangle 108"/>
           <p:cNvSpPr/>
           <p:nvPr/>
         </p:nvSpPr>
@@ -8368,7 +8088,7 @@
       </p:sp>
       <p:sp>
         <p:nvSpPr>
-          <p:cNvPr id="118" name="Rectangle 117"/>
+          <p:cNvPr id="110" name="Rectangle 109"/>
           <p:cNvSpPr/>
           <p:nvPr/>
         </p:nvSpPr>
@@ -8418,7 +8138,7 @@
       </p:sp>
       <p:sp>
         <p:nvSpPr>
-          <p:cNvPr id="119" name="Rounded Rectangle 118"/>
+          <p:cNvPr id="111" name="Rounded Rectangle 110"/>
           <p:cNvSpPr/>
           <p:nvPr/>
         </p:nvSpPr>
@@ -8464,7 +8184,7 @@
       </p:sp>
       <p:sp>
         <p:nvSpPr>
-          <p:cNvPr id="120" name="Rectangle 119"/>
+          <p:cNvPr id="112" name="Rectangle 111"/>
           <p:cNvSpPr/>
           <p:nvPr/>
         </p:nvSpPr>
@@ -8514,7 +8234,7 @@
       </p:sp>
       <p:sp>
         <p:nvSpPr>
-          <p:cNvPr id="121" name="Pentagon 120"/>
+          <p:cNvPr id="113" name="Pentagon 112"/>
           <p:cNvSpPr/>
           <p:nvPr/>
         </p:nvSpPr>
@@ -8560,7 +8280,7 @@
       </p:sp>
       <p:sp>
         <p:nvSpPr>
-          <p:cNvPr id="122" name="Rectangle 121"/>
+          <p:cNvPr id="114" name="Rectangle 113"/>
           <p:cNvSpPr/>
           <p:nvPr/>
         </p:nvSpPr>
@@ -8610,7 +8330,7 @@
       </p:sp>
       <p:sp>
         <p:nvSpPr>
-          <p:cNvPr id="123" name="Pentagon 122"/>
+          <p:cNvPr id="115" name="Pentagon 114"/>
           <p:cNvSpPr/>
           <p:nvPr/>
         </p:nvSpPr>
@@ -8656,7 +8376,7 @@
       </p:sp>
       <p:sp>
         <p:nvSpPr>
-          <p:cNvPr id="124" name="Rectangle 123"/>
+          <p:cNvPr id="116" name="Rectangle 115"/>
           <p:cNvSpPr/>
           <p:nvPr/>
         </p:nvSpPr>

--- a/roadmap_parallel.pptx
+++ b/roadmap_parallel.pptx
@@ -7033,7 +7033,7 @@
         </p:nvSpPr>
         <p:spPr>
           <a:xfrm>
-            <a:off x="11889936" y="1243584"/>
+            <a:off x="11889936" y="1865376"/>
             <a:ext cx="146304" cy="146304"/>
           </a:xfrm>
           <a:prstGeom prst="diamond">
@@ -7125,7 +7125,7 @@
         </p:nvSpPr>
         <p:spPr>
           <a:xfrm>
-            <a:off x="8300208" y="2176272"/>
+            <a:off x="8300208" y="2798064"/>
             <a:ext cx="146304" cy="146304"/>
           </a:xfrm>
           <a:prstGeom prst="diamond">
@@ -7217,7 +7217,7 @@
         </p:nvSpPr>
         <p:spPr>
           <a:xfrm>
-            <a:off x="11889936" y="3108960"/>
+            <a:off x="11889936" y="3730752"/>
             <a:ext cx="146304" cy="146304"/>
           </a:xfrm>
           <a:prstGeom prst="diamond">
@@ -7309,7 +7309,7 @@
         </p:nvSpPr>
         <p:spPr>
           <a:xfrm>
-            <a:off x="8300208" y="4041648"/>
+            <a:off x="8300208" y="4663440"/>
             <a:ext cx="146304" cy="146304"/>
           </a:xfrm>
           <a:prstGeom prst="diamond">
